--- a/test/fixtures/tiny.pptx
+++ b/test/fixtures/tiny.pptx
@@ -4,7 +4,7 @@
 </file>
 
 <file path=ppt/slides/slide1.xml><?xml version="1.0" encoding="utf-8"?>
-<p:sld xmlns:p="http://schemas.openxmlformats.org/presentationml/2006/main" xmlns:a="http://schemas.openxmlformats.org/drawingml/2006/main" xmlns:r="http://schemas.openxmlformats.org/officeDocument/2006/relationships">
+<p:sld xmlns:p="http://schemas.openxmlformats.org/presentationml/2006/main" xmlns:a="http://schemas.openxmlformats.org/drawingml/2006/main" xmlns:r="http://schemas.openxmlformats.org/officeDocument/2006/relationships" xmlns:c="http://schemas.openxmlformats.org/drawingml/2006/chart">
   <p:cSld>
     <p:spTree>
       <p:sp>
@@ -55,7 +55,7 @@
 </file>
 
 <file path=ppt/slides/slide2.xml><?xml version="1.0" encoding="utf-8"?>
-<p:sld xmlns:p="http://schemas.openxmlformats.org/presentationml/2006/main" xmlns:a="http://schemas.openxmlformats.org/drawingml/2006/main" xmlns:r="http://schemas.openxmlformats.org/officeDocument/2006/relationships">
+<p:sld xmlns:p="http://schemas.openxmlformats.org/presentationml/2006/main" xmlns:a="http://schemas.openxmlformats.org/drawingml/2006/main" xmlns:r="http://schemas.openxmlformats.org/officeDocument/2006/relationships" xmlns:c="http://schemas.openxmlformats.org/drawingml/2006/chart">
   <p:cSld>
     <p:spTree>
       <p:sp>
